--- a/dist/초5/수학/도형과측정/초5_수학_도형과측정_04_직육면체와정육면체_학생용.pptx
+++ b/dist/초5/수학/도형과측정/초5_수학_도형과측정_04_직육면체와정육면체_학생용.pptx
@@ -120,13 +120,13 @@
   <p:extLst>
     <p:ext uri="{521415D9-36F7-43E2-AB2F-B90AF26B5E84}">
       <p14:sectionLst xmlns:p14="http://schemas.microsoft.com/office/powerpoint/2010/main">
-        <p14:section name="도입" id="{6b78480e-205d-03aa-56fa-4ffc9f37fc2d}">
+        <p14:section name="도입" id="{29010983-858c-2e8e-46a4-fc01e37ebb91}">
           <p14:sldIdLst>
             <p14:sldId id="256"/>
             <p14:sldId id="257"/>
           </p14:sldIdLst>
         </p14:section>
-        <p14:section name="개념" id="{84d85ef9-fc77-4d3d-70d2-c5b8f8c67110}">
+        <p14:section name="개념" id="{a0e12744-3bf8-1fb1-022f-ca9f5c976f89}">
           <p14:sldIdLst>
             <p14:sldId id="258"/>
             <p14:sldId id="259"/>
@@ -135,37 +135,37 @@
             <p14:sldId id="264"/>
           </p14:sldIdLst>
         </p14:section>
-        <p14:section name="연습" id="{69803c15-cef0-bc09-3a1f-1e05702ea2c9}">
+        <p14:section name="연습" id="{f3ae039d-8b74-ecca-7966-7be1112fed8b}">
           <p14:sldIdLst>
             <p14:sldId id="260"/>
             <p14:sldId id="262"/>
             <p14:sldId id="265"/>
           </p14:sldIdLst>
         </p14:section>
-        <p14:section name="개념" id="{f5028e1c-f4bc-24eb-c5cf-07f99776b143}">
+        <p14:section name="개념" id="{a9ecc3e7-809b-5e61-4e55-77ec1ad4f750}">
           <p14:sldIdLst/>
         </p14:section>
-        <p14:section name="연습" id="{a73ce62c-ea02-8339-9ff4-56bf9ab01f63}">
+        <p14:section name="연습" id="{14308af0-e0cd-c8af-3509-9df74b0870ae}">
           <p14:sldIdLst/>
         </p14:section>
-        <p14:section name="개념" id="{74e816bc-fa55-2a49-fedd-4d571284f5fa}">
+        <p14:section name="개념" id="{d1e3e694-730c-6a2a-a594-e8f8b9506795}">
           <p14:sldIdLst/>
         </p14:section>
-        <p14:section name="연습" id="{b9d30176-44ed-5fd5-ad68-98f96951c87f}">
+        <p14:section name="연습" id="{74409b05-932a-854d-784f-aed9f8dd3fc3}">
           <p14:sldIdLst/>
         </p14:section>
-        <p14:section name="확인" id="{39a86590-6561-89ad-0976-471b0ba27370}">
+        <p14:section name="확인" id="{14253290-bf5c-bb71-79ed-1fd8569e92b8}">
           <p14:sldIdLst>
             <p14:sldId id="266"/>
             <p14:sldId id="267"/>
           </p14:sldIdLst>
         </p14:section>
-        <p14:section name="정리" id="{b2a82c78-0d36-1fd5-80d5-f03c94066cbc}">
+        <p14:section name="정리" id="{c1812e68-45f3-a7ad-3b43-8328d4c2ae09}">
           <p14:sldIdLst>
             <p14:sldId id="268"/>
           </p14:sldIdLst>
         </p14:section>
-        <p14:section name="보충" id="{806d27f5-3069-eba5-c5b1-0715200ce781}">
+        <p14:section name="보충" id="{ee750c91-4e70-250a-63b5-08cbf60f299e}">
           <p14:sldIdLst>
             <p14:sldId id="269"/>
           </p14:sldIdLst>
@@ -4334,7 +4334,7 @@
         </p:nvSpPr>
         <p:spPr>
           <a:xfrm>
-            <a:off x="6584123" y="2333306"/>
+            <a:off x="6536708" y="2285891"/>
             <a:ext cx="483108" cy="476250"/>
           </a:xfrm>
           <a:prstGeom prst="rect">
@@ -4373,7 +4373,7 @@
         </p:nvSpPr>
         <p:spPr>
           <a:xfrm>
-            <a:off x="6584123" y="3636964"/>
+            <a:off x="6536708" y="3684379"/>
             <a:ext cx="483108" cy="476250"/>
           </a:xfrm>
           <a:prstGeom prst="rect">
@@ -4412,7 +4412,7 @@
         </p:nvSpPr>
         <p:spPr>
           <a:xfrm>
-            <a:off x="10850437" y="3636964"/>
+            <a:off x="10897852" y="3684379"/>
             <a:ext cx="483108" cy="476250"/>
           </a:xfrm>
           <a:prstGeom prst="rect">
@@ -4451,7 +4451,7 @@
         </p:nvSpPr>
         <p:spPr>
           <a:xfrm>
-            <a:off x="10850437" y="2333306"/>
+            <a:off x="10897852" y="2285891"/>
             <a:ext cx="483108" cy="476250"/>
           </a:xfrm>
           <a:prstGeom prst="rect">
@@ -4899,7 +4899,7 @@
                 <a:ea typeface="맑은 고딕" pitchFamily="34" charset="-122"/>
                 <a:cs typeface="맑은 고딕" pitchFamily="34" charset="-120"/>
               </a:rPr>
-              <a:t>점 ㄱ과 만나는</a:t>
+              <a:t>점 ㄱ과 만나는 점은?</a:t>
             </a:r>
             <a:endParaRPr lang="ko-KR" sz="2800" dirty="0"/>
           </a:p>
@@ -4916,7 +4916,7 @@
                 <a:ea typeface="맑은 고딕" pitchFamily="34" charset="-122"/>
                 <a:cs typeface="맑은 고딕" pitchFamily="34" charset="-120"/>
               </a:rPr>
-              <a:t>점은?</a:t>
+              <a:t>(ㄴ, ㄷ, ㄹ 중)</a:t>
             </a:r>
             <a:endParaRPr lang="ko-KR" sz="2800" dirty="0"/>
           </a:p>
